--- a/Supp Data/Fig 3.pptx
+++ b/Supp Data/Fig 3.pptx
@@ -2,7 +2,7 @@
 <file path=ppt/presentation.xml><?xml version="1.0" encoding="utf-8"?>
 <p:presentation xmlns:a="http://schemas.openxmlformats.org/drawingml/2006/main" xmlns:r="http://schemas.openxmlformats.org/officeDocument/2006/relationships" xmlns:p="http://schemas.openxmlformats.org/presentationml/2006/main" saveSubsetFonts="1" autoCompressPictures="0">
   <p:sldMasterIdLst>
-    <p:sldMasterId id="2147483960" r:id="rId1"/>
+    <p:sldMasterId id="2147484044" r:id="rId1"/>
   </p:sldMasterIdLst>
   <p:notesMasterIdLst>
     <p:notesMasterId r:id="rId3"/>
@@ -10,7 +10,7 @@
   <p:sldIdLst>
     <p:sldId id="280" r:id="rId2"/>
   </p:sldIdLst>
-  <p:sldSz cx="2160588" cy="936625"/>
+  <p:sldSz cx="2160588" cy="1771650"/>
   <p:notesSz cx="6858000" cy="9144000"/>
   <p:defaultTextStyle>
     <a:defPPr>
@@ -197,7 +197,7 @@
           <a:p>
             <a:fld id="{810CFC23-F338-EB41-8653-4316F1EF48B5}" type="datetimeFigureOut">
               <a:rPr lang="en-DE" smtClean="0"/>
-              <a:t>11.05.26</a:t>
+              <a:t>21.05.26</a:t>
             </a:fld>
             <a:endParaRPr lang="en-DE"/>
           </a:p>
@@ -215,8 +215,8 @@
         </p:nvSpPr>
         <p:spPr>
           <a:xfrm>
-            <a:off x="-130175" y="1143000"/>
-            <a:ext cx="7118350" cy="3086100"/>
+            <a:off x="1547813" y="1143000"/>
+            <a:ext cx="3762375" cy="3086100"/>
           </a:xfrm>
           <a:prstGeom prst="rect">
             <a:avLst/>
@@ -494,8 +494,8 @@
         </p:nvSpPr>
         <p:spPr>
           <a:xfrm>
-            <a:off x="-130175" y="1143000"/>
-            <a:ext cx="7118350" cy="3086100"/>
+            <a:off x="1547813" y="1143000"/>
+            <a:ext cx="3762375" cy="3086100"/>
           </a:xfrm>
         </p:spPr>
       </p:sp>
@@ -1317,15 +1317,15 @@
         </p:nvSpPr>
         <p:spPr>
           <a:xfrm>
-            <a:off x="270074" y="153286"/>
-            <a:ext cx="1620441" cy="326084"/>
+            <a:off x="162044" y="289944"/>
+            <a:ext cx="1836500" cy="616797"/>
           </a:xfrm>
         </p:spPr>
         <p:txBody>
           <a:bodyPr anchor="b"/>
           <a:lstStyle>
             <a:lvl1pPr algn="ctr">
-              <a:defRPr sz="820"/>
+              <a:defRPr sz="1418"/>
             </a:lvl1pPr>
           </a:lstStyle>
           <a:p>
@@ -1349,8 +1349,8 @@
         </p:nvSpPr>
         <p:spPr>
           <a:xfrm>
-            <a:off x="270074" y="491945"/>
-            <a:ext cx="1620441" cy="226134"/>
+            <a:off x="270074" y="930526"/>
+            <a:ext cx="1620441" cy="427739"/>
           </a:xfrm>
         </p:spPr>
         <p:txBody>
@@ -1358,39 +1358,39 @@
           <a:lstStyle>
             <a:lvl1pPr marL="0" indent="0" algn="ctr">
               <a:buNone/>
-              <a:defRPr sz="328"/>
+              <a:defRPr sz="567"/>
             </a:lvl1pPr>
-            <a:lvl2pPr marL="62454" indent="0" algn="ctr">
-              <a:buNone/>
-              <a:defRPr sz="273"/>
+            <a:lvl2pPr marL="108036" indent="0" algn="ctr">
+              <a:buNone/>
+              <a:defRPr sz="473"/>
             </a:lvl2pPr>
-            <a:lvl3pPr marL="124907" indent="0" algn="ctr">
-              <a:buNone/>
-              <a:defRPr sz="246"/>
+            <a:lvl3pPr marL="216073" indent="0" algn="ctr">
+              <a:buNone/>
+              <a:defRPr sz="425"/>
             </a:lvl3pPr>
-            <a:lvl4pPr marL="187361" indent="0" algn="ctr">
-              <a:buNone/>
-              <a:defRPr sz="219"/>
+            <a:lvl4pPr marL="324109" indent="0" algn="ctr">
+              <a:buNone/>
+              <a:defRPr sz="378"/>
             </a:lvl4pPr>
-            <a:lvl5pPr marL="249814" indent="0" algn="ctr">
-              <a:buNone/>
-              <a:defRPr sz="219"/>
+            <a:lvl5pPr marL="432145" indent="0" algn="ctr">
+              <a:buNone/>
+              <a:defRPr sz="378"/>
             </a:lvl5pPr>
-            <a:lvl6pPr marL="312268" indent="0" algn="ctr">
-              <a:buNone/>
-              <a:defRPr sz="219"/>
+            <a:lvl6pPr marL="540182" indent="0" algn="ctr">
+              <a:buNone/>
+              <a:defRPr sz="378"/>
             </a:lvl6pPr>
-            <a:lvl7pPr marL="374721" indent="0" algn="ctr">
-              <a:buNone/>
-              <a:defRPr sz="219"/>
+            <a:lvl7pPr marL="648218" indent="0" algn="ctr">
+              <a:buNone/>
+              <a:defRPr sz="378"/>
             </a:lvl7pPr>
-            <a:lvl8pPr marL="437175" indent="0" algn="ctr">
-              <a:buNone/>
-              <a:defRPr sz="219"/>
+            <a:lvl8pPr marL="756255" indent="0" algn="ctr">
+              <a:buNone/>
+              <a:defRPr sz="378"/>
             </a:lvl8pPr>
-            <a:lvl9pPr marL="499628" indent="0" algn="ctr">
-              <a:buNone/>
-              <a:defRPr sz="219"/>
+            <a:lvl9pPr marL="864291" indent="0" algn="ctr">
+              <a:buNone/>
+              <a:defRPr sz="378"/>
             </a:lvl9pPr>
           </a:lstStyle>
           <a:p>
@@ -1419,7 +1419,7 @@
           <a:p>
             <a:fld id="{CF9FBDB8-36C6-4744-999D-C99C2C96D370}" type="datetimeFigureOut">
               <a:rPr lang="en-DE" smtClean="0"/>
-              <a:t>11.05.26</a:t>
+              <a:t>21.05.26</a:t>
             </a:fld>
             <a:endParaRPr lang="en-DE"/>
           </a:p>
@@ -1470,7 +1470,7 @@
     </p:spTree>
     <p:extLst>
       <p:ext uri="{BB962C8B-B14F-4D97-AF65-F5344CB8AC3E}">
-        <p14:creationId xmlns:p14="http://schemas.microsoft.com/office/powerpoint/2010/main" val="1149435336"/>
+        <p14:creationId xmlns:p14="http://schemas.microsoft.com/office/powerpoint/2010/main" val="3699465873"/>
       </p:ext>
     </p:extLst>
   </p:cSld>
@@ -1589,7 +1589,7 @@
           <a:p>
             <a:fld id="{CF9FBDB8-36C6-4744-999D-C99C2C96D370}" type="datetimeFigureOut">
               <a:rPr lang="en-DE" smtClean="0"/>
-              <a:t>11.05.26</a:t>
+              <a:t>21.05.26</a:t>
             </a:fld>
             <a:endParaRPr lang="en-DE"/>
           </a:p>
@@ -1640,7 +1640,7 @@
     </p:spTree>
     <p:extLst>
       <p:ext uri="{BB962C8B-B14F-4D97-AF65-F5344CB8AC3E}">
-        <p14:creationId xmlns:p14="http://schemas.microsoft.com/office/powerpoint/2010/main" val="2063034465"/>
+        <p14:creationId xmlns:p14="http://schemas.microsoft.com/office/powerpoint/2010/main" val="2058168179"/>
       </p:ext>
     </p:extLst>
   </p:cSld>
@@ -1679,8 +1679,8 @@
         </p:nvSpPr>
         <p:spPr>
           <a:xfrm>
-            <a:off x="1546171" y="49867"/>
-            <a:ext cx="465877" cy="793746"/>
+            <a:off x="1546171" y="94324"/>
+            <a:ext cx="465877" cy="1501391"/>
           </a:xfrm>
         </p:spPr>
         <p:txBody>
@@ -1707,8 +1707,8 @@
         </p:nvSpPr>
         <p:spPr>
           <a:xfrm>
-            <a:off x="148540" y="49867"/>
-            <a:ext cx="1370623" cy="793746"/>
+            <a:off x="148541" y="94324"/>
+            <a:ext cx="1370623" cy="1501391"/>
           </a:xfrm>
         </p:spPr>
         <p:txBody>
@@ -1769,7 +1769,7 @@
           <a:p>
             <a:fld id="{CF9FBDB8-36C6-4744-999D-C99C2C96D370}" type="datetimeFigureOut">
               <a:rPr lang="en-DE" smtClean="0"/>
-              <a:t>11.05.26</a:t>
+              <a:t>21.05.26</a:t>
             </a:fld>
             <a:endParaRPr lang="en-DE"/>
           </a:p>
@@ -1820,7 +1820,7 @@
     </p:spTree>
     <p:extLst>
       <p:ext uri="{BB962C8B-B14F-4D97-AF65-F5344CB8AC3E}">
-        <p14:creationId xmlns:p14="http://schemas.microsoft.com/office/powerpoint/2010/main" val="4046673036"/>
+        <p14:creationId xmlns:p14="http://schemas.microsoft.com/office/powerpoint/2010/main" val="2896028258"/>
       </p:ext>
     </p:extLst>
   </p:cSld>
@@ -1939,7 +1939,7 @@
           <a:p>
             <a:fld id="{CF9FBDB8-36C6-4744-999D-C99C2C96D370}" type="datetimeFigureOut">
               <a:rPr lang="en-DE" smtClean="0"/>
-              <a:t>11.05.26</a:t>
+              <a:t>21.05.26</a:t>
             </a:fld>
             <a:endParaRPr lang="en-DE"/>
           </a:p>
@@ -1990,7 +1990,7 @@
     </p:spTree>
     <p:extLst>
       <p:ext uri="{BB962C8B-B14F-4D97-AF65-F5344CB8AC3E}">
-        <p14:creationId xmlns:p14="http://schemas.microsoft.com/office/powerpoint/2010/main" val="3064108849"/>
+        <p14:creationId xmlns:p14="http://schemas.microsoft.com/office/powerpoint/2010/main" val="3590137107"/>
       </p:ext>
     </p:extLst>
   </p:cSld>
@@ -2029,15 +2029,15 @@
         </p:nvSpPr>
         <p:spPr>
           <a:xfrm>
-            <a:off x="147415" y="233506"/>
-            <a:ext cx="1863507" cy="389610"/>
+            <a:off x="147415" y="441683"/>
+            <a:ext cx="1863507" cy="736957"/>
           </a:xfrm>
         </p:spPr>
         <p:txBody>
           <a:bodyPr anchor="b"/>
           <a:lstStyle>
             <a:lvl1pPr>
-              <a:defRPr sz="820"/>
+              <a:defRPr sz="1418"/>
             </a:lvl1pPr>
           </a:lstStyle>
           <a:p>
@@ -2061,8 +2061,8 @@
         </p:nvSpPr>
         <p:spPr>
           <a:xfrm>
-            <a:off x="147415" y="626802"/>
-            <a:ext cx="1863507" cy="204887"/>
+            <a:off x="147415" y="1185612"/>
+            <a:ext cx="1863507" cy="387548"/>
           </a:xfrm>
         </p:spPr>
         <p:txBody>
@@ -2070,7 +2070,7 @@
           <a:lstStyle>
             <a:lvl1pPr marL="0" indent="0">
               <a:buNone/>
-              <a:defRPr sz="328">
+              <a:defRPr sz="567">
                 <a:solidFill>
                   <a:schemeClr val="tx1">
                     <a:tint val="82000"/>
@@ -2078,9 +2078,9 @@
                 </a:solidFill>
               </a:defRPr>
             </a:lvl1pPr>
-            <a:lvl2pPr marL="62454" indent="0">
-              <a:buNone/>
-              <a:defRPr sz="273">
+            <a:lvl2pPr marL="108036" indent="0">
+              <a:buNone/>
+              <a:defRPr sz="473">
                 <a:solidFill>
                   <a:schemeClr val="tx1">
                     <a:tint val="82000"/>
@@ -2088,9 +2088,9 @@
                 </a:solidFill>
               </a:defRPr>
             </a:lvl2pPr>
-            <a:lvl3pPr marL="124907" indent="0">
-              <a:buNone/>
-              <a:defRPr sz="246">
+            <a:lvl3pPr marL="216073" indent="0">
+              <a:buNone/>
+              <a:defRPr sz="425">
                 <a:solidFill>
                   <a:schemeClr val="tx1">
                     <a:tint val="82000"/>
@@ -2098,9 +2098,9 @@
                 </a:solidFill>
               </a:defRPr>
             </a:lvl3pPr>
-            <a:lvl4pPr marL="187361" indent="0">
-              <a:buNone/>
-              <a:defRPr sz="219">
+            <a:lvl4pPr marL="324109" indent="0">
+              <a:buNone/>
+              <a:defRPr sz="378">
                 <a:solidFill>
                   <a:schemeClr val="tx1">
                     <a:tint val="82000"/>
@@ -2108,9 +2108,9 @@
                 </a:solidFill>
               </a:defRPr>
             </a:lvl4pPr>
-            <a:lvl5pPr marL="249814" indent="0">
-              <a:buNone/>
-              <a:defRPr sz="219">
+            <a:lvl5pPr marL="432145" indent="0">
+              <a:buNone/>
+              <a:defRPr sz="378">
                 <a:solidFill>
                   <a:schemeClr val="tx1">
                     <a:tint val="82000"/>
@@ -2118,9 +2118,9 @@
                 </a:solidFill>
               </a:defRPr>
             </a:lvl5pPr>
-            <a:lvl6pPr marL="312268" indent="0">
-              <a:buNone/>
-              <a:defRPr sz="219">
+            <a:lvl6pPr marL="540182" indent="0">
+              <a:buNone/>
+              <a:defRPr sz="378">
                 <a:solidFill>
                   <a:schemeClr val="tx1">
                     <a:tint val="82000"/>
@@ -2128,9 +2128,9 @@
                 </a:solidFill>
               </a:defRPr>
             </a:lvl6pPr>
-            <a:lvl7pPr marL="374721" indent="0">
-              <a:buNone/>
-              <a:defRPr sz="219">
+            <a:lvl7pPr marL="648218" indent="0">
+              <a:buNone/>
+              <a:defRPr sz="378">
                 <a:solidFill>
                   <a:schemeClr val="tx1">
                     <a:tint val="82000"/>
@@ -2138,9 +2138,9 @@
                 </a:solidFill>
               </a:defRPr>
             </a:lvl7pPr>
-            <a:lvl8pPr marL="437175" indent="0">
-              <a:buNone/>
-              <a:defRPr sz="219">
+            <a:lvl8pPr marL="756255" indent="0">
+              <a:buNone/>
+              <a:defRPr sz="378">
                 <a:solidFill>
                   <a:schemeClr val="tx1">
                     <a:tint val="82000"/>
@@ -2148,9 +2148,9 @@
                 </a:solidFill>
               </a:defRPr>
             </a:lvl8pPr>
-            <a:lvl9pPr marL="499628" indent="0">
-              <a:buNone/>
-              <a:defRPr sz="219">
+            <a:lvl9pPr marL="864291" indent="0">
+              <a:buNone/>
+              <a:defRPr sz="378">
                 <a:solidFill>
                   <a:schemeClr val="tx1">
                     <a:tint val="82000"/>
@@ -2185,7 +2185,7 @@
           <a:p>
             <a:fld id="{CF9FBDB8-36C6-4744-999D-C99C2C96D370}" type="datetimeFigureOut">
               <a:rPr lang="en-DE" smtClean="0"/>
-              <a:t>11.05.26</a:t>
+              <a:t>21.05.26</a:t>
             </a:fld>
             <a:endParaRPr lang="en-DE"/>
           </a:p>
@@ -2236,7 +2236,7 @@
     </p:spTree>
     <p:extLst>
       <p:ext uri="{BB962C8B-B14F-4D97-AF65-F5344CB8AC3E}">
-        <p14:creationId xmlns:p14="http://schemas.microsoft.com/office/powerpoint/2010/main" val="3982396075"/>
+        <p14:creationId xmlns:p14="http://schemas.microsoft.com/office/powerpoint/2010/main" val="190084953"/>
       </p:ext>
     </p:extLst>
   </p:cSld>
@@ -2298,8 +2298,8 @@
         </p:nvSpPr>
         <p:spPr>
           <a:xfrm>
-            <a:off x="148540" y="249333"/>
-            <a:ext cx="918250" cy="594280"/>
+            <a:off x="148540" y="471620"/>
+            <a:ext cx="918250" cy="1124096"/>
           </a:xfrm>
         </p:spPr>
         <p:txBody>
@@ -2355,8 +2355,8 @@
         </p:nvSpPr>
         <p:spPr>
           <a:xfrm>
-            <a:off x="1093798" y="249333"/>
-            <a:ext cx="918250" cy="594280"/>
+            <a:off x="1093798" y="471620"/>
+            <a:ext cx="918250" cy="1124096"/>
           </a:xfrm>
         </p:spPr>
         <p:txBody>
@@ -2417,7 +2417,7 @@
           <a:p>
             <a:fld id="{CF9FBDB8-36C6-4744-999D-C99C2C96D370}" type="datetimeFigureOut">
               <a:rPr lang="en-DE" smtClean="0"/>
-              <a:t>11.05.26</a:t>
+              <a:t>21.05.26</a:t>
             </a:fld>
             <a:endParaRPr lang="en-DE"/>
           </a:p>
@@ -2468,7 +2468,7 @@
     </p:spTree>
     <p:extLst>
       <p:ext uri="{BB962C8B-B14F-4D97-AF65-F5344CB8AC3E}">
-        <p14:creationId xmlns:p14="http://schemas.microsoft.com/office/powerpoint/2010/main" val="2536883038"/>
+        <p14:creationId xmlns:p14="http://schemas.microsoft.com/office/powerpoint/2010/main" val="4281943122"/>
       </p:ext>
     </p:extLst>
   </p:cSld>
@@ -2507,8 +2507,8 @@
         </p:nvSpPr>
         <p:spPr>
           <a:xfrm>
-            <a:off x="148822" y="49866"/>
-            <a:ext cx="1863507" cy="181038"/>
+            <a:off x="148822" y="94324"/>
+            <a:ext cx="1863507" cy="342437"/>
           </a:xfrm>
         </p:spPr>
         <p:txBody>
@@ -2535,8 +2535,8 @@
         </p:nvSpPr>
         <p:spPr>
           <a:xfrm>
-            <a:off x="148822" y="229603"/>
-            <a:ext cx="914030" cy="112525"/>
+            <a:off x="148822" y="434300"/>
+            <a:ext cx="914030" cy="212844"/>
           </a:xfrm>
         </p:spPr>
         <p:txBody>
@@ -2544,39 +2544,39 @@
           <a:lstStyle>
             <a:lvl1pPr marL="0" indent="0">
               <a:buNone/>
-              <a:defRPr sz="328" b="1"/>
+              <a:defRPr sz="567" b="1"/>
             </a:lvl1pPr>
-            <a:lvl2pPr marL="62454" indent="0">
-              <a:buNone/>
-              <a:defRPr sz="273" b="1"/>
+            <a:lvl2pPr marL="108036" indent="0">
+              <a:buNone/>
+              <a:defRPr sz="473" b="1"/>
             </a:lvl2pPr>
-            <a:lvl3pPr marL="124907" indent="0">
-              <a:buNone/>
-              <a:defRPr sz="246" b="1"/>
+            <a:lvl3pPr marL="216073" indent="0">
+              <a:buNone/>
+              <a:defRPr sz="425" b="1"/>
             </a:lvl3pPr>
-            <a:lvl4pPr marL="187361" indent="0">
-              <a:buNone/>
-              <a:defRPr sz="219" b="1"/>
+            <a:lvl4pPr marL="324109" indent="0">
+              <a:buNone/>
+              <a:defRPr sz="378" b="1"/>
             </a:lvl4pPr>
-            <a:lvl5pPr marL="249814" indent="0">
-              <a:buNone/>
-              <a:defRPr sz="219" b="1"/>
+            <a:lvl5pPr marL="432145" indent="0">
+              <a:buNone/>
+              <a:defRPr sz="378" b="1"/>
             </a:lvl5pPr>
-            <a:lvl6pPr marL="312268" indent="0">
-              <a:buNone/>
-              <a:defRPr sz="219" b="1"/>
+            <a:lvl6pPr marL="540182" indent="0">
+              <a:buNone/>
+              <a:defRPr sz="378" b="1"/>
             </a:lvl6pPr>
-            <a:lvl7pPr marL="374721" indent="0">
-              <a:buNone/>
-              <a:defRPr sz="219" b="1"/>
+            <a:lvl7pPr marL="648218" indent="0">
+              <a:buNone/>
+              <a:defRPr sz="378" b="1"/>
             </a:lvl7pPr>
-            <a:lvl8pPr marL="437175" indent="0">
-              <a:buNone/>
-              <a:defRPr sz="219" b="1"/>
+            <a:lvl8pPr marL="756255" indent="0">
+              <a:buNone/>
+              <a:defRPr sz="378" b="1"/>
             </a:lvl8pPr>
-            <a:lvl9pPr marL="499628" indent="0">
-              <a:buNone/>
-              <a:defRPr sz="219" b="1"/>
+            <a:lvl9pPr marL="864291" indent="0">
+              <a:buNone/>
+              <a:defRPr sz="378" b="1"/>
             </a:lvl9pPr>
           </a:lstStyle>
           <a:p>
@@ -2600,8 +2600,8 @@
         </p:nvSpPr>
         <p:spPr>
           <a:xfrm>
-            <a:off x="148822" y="342128"/>
-            <a:ext cx="914030" cy="503219"/>
+            <a:off x="148822" y="647144"/>
+            <a:ext cx="914030" cy="951852"/>
           </a:xfrm>
         </p:spPr>
         <p:txBody>
@@ -2657,8 +2657,8 @@
         </p:nvSpPr>
         <p:spPr>
           <a:xfrm>
-            <a:off x="1093798" y="229603"/>
-            <a:ext cx="918531" cy="112525"/>
+            <a:off x="1093798" y="434300"/>
+            <a:ext cx="918531" cy="212844"/>
           </a:xfrm>
         </p:spPr>
         <p:txBody>
@@ -2666,39 +2666,39 @@
           <a:lstStyle>
             <a:lvl1pPr marL="0" indent="0">
               <a:buNone/>
-              <a:defRPr sz="328" b="1"/>
+              <a:defRPr sz="567" b="1"/>
             </a:lvl1pPr>
-            <a:lvl2pPr marL="62454" indent="0">
-              <a:buNone/>
-              <a:defRPr sz="273" b="1"/>
+            <a:lvl2pPr marL="108036" indent="0">
+              <a:buNone/>
+              <a:defRPr sz="473" b="1"/>
             </a:lvl2pPr>
-            <a:lvl3pPr marL="124907" indent="0">
-              <a:buNone/>
-              <a:defRPr sz="246" b="1"/>
+            <a:lvl3pPr marL="216073" indent="0">
+              <a:buNone/>
+              <a:defRPr sz="425" b="1"/>
             </a:lvl3pPr>
-            <a:lvl4pPr marL="187361" indent="0">
-              <a:buNone/>
-              <a:defRPr sz="219" b="1"/>
+            <a:lvl4pPr marL="324109" indent="0">
+              <a:buNone/>
+              <a:defRPr sz="378" b="1"/>
             </a:lvl4pPr>
-            <a:lvl5pPr marL="249814" indent="0">
-              <a:buNone/>
-              <a:defRPr sz="219" b="1"/>
+            <a:lvl5pPr marL="432145" indent="0">
+              <a:buNone/>
+              <a:defRPr sz="378" b="1"/>
             </a:lvl5pPr>
-            <a:lvl6pPr marL="312268" indent="0">
-              <a:buNone/>
-              <a:defRPr sz="219" b="1"/>
+            <a:lvl6pPr marL="540182" indent="0">
+              <a:buNone/>
+              <a:defRPr sz="378" b="1"/>
             </a:lvl6pPr>
-            <a:lvl7pPr marL="374721" indent="0">
-              <a:buNone/>
-              <a:defRPr sz="219" b="1"/>
+            <a:lvl7pPr marL="648218" indent="0">
+              <a:buNone/>
+              <a:defRPr sz="378" b="1"/>
             </a:lvl7pPr>
-            <a:lvl8pPr marL="437175" indent="0">
-              <a:buNone/>
-              <a:defRPr sz="219" b="1"/>
+            <a:lvl8pPr marL="756255" indent="0">
+              <a:buNone/>
+              <a:defRPr sz="378" b="1"/>
             </a:lvl8pPr>
-            <a:lvl9pPr marL="499628" indent="0">
-              <a:buNone/>
-              <a:defRPr sz="219" b="1"/>
+            <a:lvl9pPr marL="864291" indent="0">
+              <a:buNone/>
+              <a:defRPr sz="378" b="1"/>
             </a:lvl9pPr>
           </a:lstStyle>
           <a:p>
@@ -2722,8 +2722,8 @@
         </p:nvSpPr>
         <p:spPr>
           <a:xfrm>
-            <a:off x="1093798" y="342128"/>
-            <a:ext cx="918531" cy="503219"/>
+            <a:off x="1093798" y="647144"/>
+            <a:ext cx="918531" cy="951852"/>
           </a:xfrm>
         </p:spPr>
         <p:txBody>
@@ -2784,7 +2784,7 @@
           <a:p>
             <a:fld id="{CF9FBDB8-36C6-4744-999D-C99C2C96D370}" type="datetimeFigureOut">
               <a:rPr lang="en-DE" smtClean="0"/>
-              <a:t>11.05.26</a:t>
+              <a:t>21.05.26</a:t>
             </a:fld>
             <a:endParaRPr lang="en-DE"/>
           </a:p>
@@ -2835,7 +2835,7 @@
     </p:spTree>
     <p:extLst>
       <p:ext uri="{BB962C8B-B14F-4D97-AF65-F5344CB8AC3E}">
-        <p14:creationId xmlns:p14="http://schemas.microsoft.com/office/powerpoint/2010/main" val="3686281559"/>
+        <p14:creationId xmlns:p14="http://schemas.microsoft.com/office/powerpoint/2010/main" val="665461116"/>
       </p:ext>
     </p:extLst>
   </p:cSld>
@@ -2902,7 +2902,7 @@
           <a:p>
             <a:fld id="{CF9FBDB8-36C6-4744-999D-C99C2C96D370}" type="datetimeFigureOut">
               <a:rPr lang="en-DE" smtClean="0"/>
-              <a:t>11.05.26</a:t>
+              <a:t>21.05.26</a:t>
             </a:fld>
             <a:endParaRPr lang="en-DE"/>
           </a:p>
@@ -2953,7 +2953,7 @@
     </p:spTree>
     <p:extLst>
       <p:ext uri="{BB962C8B-B14F-4D97-AF65-F5344CB8AC3E}">
-        <p14:creationId xmlns:p14="http://schemas.microsoft.com/office/powerpoint/2010/main" val="473673485"/>
+        <p14:creationId xmlns:p14="http://schemas.microsoft.com/office/powerpoint/2010/main" val="415432634"/>
       </p:ext>
     </p:extLst>
   </p:cSld>
@@ -2997,7 +2997,7 @@
           <a:p>
             <a:fld id="{CF9FBDB8-36C6-4744-999D-C99C2C96D370}" type="datetimeFigureOut">
               <a:rPr lang="en-DE" smtClean="0"/>
-              <a:t>11.05.26</a:t>
+              <a:t>21.05.26</a:t>
             </a:fld>
             <a:endParaRPr lang="en-DE"/>
           </a:p>
@@ -3048,7 +3048,7 @@
     </p:spTree>
     <p:extLst>
       <p:ext uri="{BB962C8B-B14F-4D97-AF65-F5344CB8AC3E}">
-        <p14:creationId xmlns:p14="http://schemas.microsoft.com/office/powerpoint/2010/main" val="1666182691"/>
+        <p14:creationId xmlns:p14="http://schemas.microsoft.com/office/powerpoint/2010/main" val="1130867555"/>
       </p:ext>
     </p:extLst>
   </p:cSld>
@@ -3087,15 +3087,15 @@
         </p:nvSpPr>
         <p:spPr>
           <a:xfrm>
-            <a:off x="148822" y="62442"/>
-            <a:ext cx="696846" cy="218546"/>
+            <a:off x="148822" y="118110"/>
+            <a:ext cx="696846" cy="413385"/>
           </a:xfrm>
         </p:spPr>
         <p:txBody>
           <a:bodyPr anchor="b"/>
           <a:lstStyle>
             <a:lvl1pPr>
-              <a:defRPr sz="437"/>
+              <a:defRPr sz="756"/>
             </a:lvl1pPr>
           </a:lstStyle>
           <a:p>
@@ -3119,39 +3119,39 @@
         </p:nvSpPr>
         <p:spPr>
           <a:xfrm>
-            <a:off x="918531" y="134857"/>
-            <a:ext cx="1093798" cy="665611"/>
+            <a:off x="918531" y="255085"/>
+            <a:ext cx="1093798" cy="1259020"/>
           </a:xfrm>
         </p:spPr>
         <p:txBody>
           <a:bodyPr/>
           <a:lstStyle>
             <a:lvl1pPr>
-              <a:defRPr sz="437"/>
+              <a:defRPr sz="756"/>
             </a:lvl1pPr>
             <a:lvl2pPr>
-              <a:defRPr sz="382"/>
+              <a:defRPr sz="662"/>
             </a:lvl2pPr>
             <a:lvl3pPr>
-              <a:defRPr sz="328"/>
+              <a:defRPr sz="567"/>
             </a:lvl3pPr>
             <a:lvl4pPr>
-              <a:defRPr sz="273"/>
+              <a:defRPr sz="473"/>
             </a:lvl4pPr>
             <a:lvl5pPr>
-              <a:defRPr sz="273"/>
+              <a:defRPr sz="473"/>
             </a:lvl5pPr>
             <a:lvl6pPr>
-              <a:defRPr sz="273"/>
+              <a:defRPr sz="473"/>
             </a:lvl6pPr>
             <a:lvl7pPr>
-              <a:defRPr sz="273"/>
+              <a:defRPr sz="473"/>
             </a:lvl7pPr>
             <a:lvl8pPr>
-              <a:defRPr sz="273"/>
+              <a:defRPr sz="473"/>
             </a:lvl8pPr>
             <a:lvl9pPr>
-              <a:defRPr sz="273"/>
+              <a:defRPr sz="473"/>
             </a:lvl9pPr>
           </a:lstStyle>
           <a:p>
@@ -3204,8 +3204,8 @@
         </p:nvSpPr>
         <p:spPr>
           <a:xfrm>
-            <a:off x="148822" y="280988"/>
-            <a:ext cx="696846" cy="520564"/>
+            <a:off x="148822" y="531495"/>
+            <a:ext cx="696846" cy="984660"/>
           </a:xfrm>
         </p:spPr>
         <p:txBody>
@@ -3213,39 +3213,39 @@
           <a:lstStyle>
             <a:lvl1pPr marL="0" indent="0">
               <a:buNone/>
-              <a:defRPr sz="219"/>
+              <a:defRPr sz="378"/>
             </a:lvl1pPr>
-            <a:lvl2pPr marL="62454" indent="0">
-              <a:buNone/>
-              <a:defRPr sz="191"/>
+            <a:lvl2pPr marL="108036" indent="0">
+              <a:buNone/>
+              <a:defRPr sz="331"/>
             </a:lvl2pPr>
-            <a:lvl3pPr marL="124907" indent="0">
-              <a:buNone/>
-              <a:defRPr sz="164"/>
+            <a:lvl3pPr marL="216073" indent="0">
+              <a:buNone/>
+              <a:defRPr sz="284"/>
             </a:lvl3pPr>
-            <a:lvl4pPr marL="187361" indent="0">
-              <a:buNone/>
-              <a:defRPr sz="137"/>
+            <a:lvl4pPr marL="324109" indent="0">
+              <a:buNone/>
+              <a:defRPr sz="236"/>
             </a:lvl4pPr>
-            <a:lvl5pPr marL="249814" indent="0">
-              <a:buNone/>
-              <a:defRPr sz="137"/>
+            <a:lvl5pPr marL="432145" indent="0">
+              <a:buNone/>
+              <a:defRPr sz="236"/>
             </a:lvl5pPr>
-            <a:lvl6pPr marL="312268" indent="0">
-              <a:buNone/>
-              <a:defRPr sz="137"/>
+            <a:lvl6pPr marL="540182" indent="0">
+              <a:buNone/>
+              <a:defRPr sz="236"/>
             </a:lvl6pPr>
-            <a:lvl7pPr marL="374721" indent="0">
-              <a:buNone/>
-              <a:defRPr sz="137"/>
+            <a:lvl7pPr marL="648218" indent="0">
+              <a:buNone/>
+              <a:defRPr sz="236"/>
             </a:lvl7pPr>
-            <a:lvl8pPr marL="437175" indent="0">
-              <a:buNone/>
-              <a:defRPr sz="137"/>
+            <a:lvl8pPr marL="756255" indent="0">
+              <a:buNone/>
+              <a:defRPr sz="236"/>
             </a:lvl8pPr>
-            <a:lvl9pPr marL="499628" indent="0">
-              <a:buNone/>
-              <a:defRPr sz="137"/>
+            <a:lvl9pPr marL="864291" indent="0">
+              <a:buNone/>
+              <a:defRPr sz="236"/>
             </a:lvl9pPr>
           </a:lstStyle>
           <a:p>
@@ -3274,7 +3274,7 @@
           <a:p>
             <a:fld id="{CF9FBDB8-36C6-4744-999D-C99C2C96D370}" type="datetimeFigureOut">
               <a:rPr lang="en-DE" smtClean="0"/>
-              <a:t>11.05.26</a:t>
+              <a:t>21.05.26</a:t>
             </a:fld>
             <a:endParaRPr lang="en-DE"/>
           </a:p>
@@ -3325,7 +3325,7 @@
     </p:spTree>
     <p:extLst>
       <p:ext uri="{BB962C8B-B14F-4D97-AF65-F5344CB8AC3E}">
-        <p14:creationId xmlns:p14="http://schemas.microsoft.com/office/powerpoint/2010/main" val="464560350"/>
+        <p14:creationId xmlns:p14="http://schemas.microsoft.com/office/powerpoint/2010/main" val="1388137411"/>
       </p:ext>
     </p:extLst>
   </p:cSld>
@@ -3364,15 +3364,15 @@
         </p:nvSpPr>
         <p:spPr>
           <a:xfrm>
-            <a:off x="148822" y="62442"/>
-            <a:ext cx="696846" cy="218546"/>
+            <a:off x="148822" y="118110"/>
+            <a:ext cx="696846" cy="413385"/>
           </a:xfrm>
         </p:spPr>
         <p:txBody>
           <a:bodyPr anchor="b"/>
           <a:lstStyle>
             <a:lvl1pPr>
-              <a:defRPr sz="437"/>
+              <a:defRPr sz="756"/>
             </a:lvl1pPr>
           </a:lstStyle>
           <a:p>
@@ -3396,8 +3396,8 @@
         </p:nvSpPr>
         <p:spPr>
           <a:xfrm>
-            <a:off x="918531" y="134857"/>
-            <a:ext cx="1093798" cy="665611"/>
+            <a:off x="918531" y="255085"/>
+            <a:ext cx="1093798" cy="1259020"/>
           </a:xfrm>
         </p:spPr>
         <p:txBody>
@@ -3405,39 +3405,39 @@
           <a:lstStyle>
             <a:lvl1pPr marL="0" indent="0">
               <a:buNone/>
-              <a:defRPr sz="437"/>
+              <a:defRPr sz="756"/>
             </a:lvl1pPr>
-            <a:lvl2pPr marL="62454" indent="0">
-              <a:buNone/>
-              <a:defRPr sz="382"/>
+            <a:lvl2pPr marL="108036" indent="0">
+              <a:buNone/>
+              <a:defRPr sz="662"/>
             </a:lvl2pPr>
-            <a:lvl3pPr marL="124907" indent="0">
-              <a:buNone/>
-              <a:defRPr sz="328"/>
+            <a:lvl3pPr marL="216073" indent="0">
+              <a:buNone/>
+              <a:defRPr sz="567"/>
             </a:lvl3pPr>
-            <a:lvl4pPr marL="187361" indent="0">
-              <a:buNone/>
-              <a:defRPr sz="273"/>
+            <a:lvl4pPr marL="324109" indent="0">
+              <a:buNone/>
+              <a:defRPr sz="473"/>
             </a:lvl4pPr>
-            <a:lvl5pPr marL="249814" indent="0">
-              <a:buNone/>
-              <a:defRPr sz="273"/>
+            <a:lvl5pPr marL="432145" indent="0">
+              <a:buNone/>
+              <a:defRPr sz="473"/>
             </a:lvl5pPr>
-            <a:lvl6pPr marL="312268" indent="0">
-              <a:buNone/>
-              <a:defRPr sz="273"/>
+            <a:lvl6pPr marL="540182" indent="0">
+              <a:buNone/>
+              <a:defRPr sz="473"/>
             </a:lvl6pPr>
-            <a:lvl7pPr marL="374721" indent="0">
-              <a:buNone/>
-              <a:defRPr sz="273"/>
+            <a:lvl7pPr marL="648218" indent="0">
+              <a:buNone/>
+              <a:defRPr sz="473"/>
             </a:lvl7pPr>
-            <a:lvl8pPr marL="437175" indent="0">
-              <a:buNone/>
-              <a:defRPr sz="273"/>
+            <a:lvl8pPr marL="756255" indent="0">
+              <a:buNone/>
+              <a:defRPr sz="473"/>
             </a:lvl8pPr>
-            <a:lvl9pPr marL="499628" indent="0">
-              <a:buNone/>
-              <a:defRPr sz="273"/>
+            <a:lvl9pPr marL="864291" indent="0">
+              <a:buNone/>
+              <a:defRPr sz="473"/>
             </a:lvl9pPr>
           </a:lstStyle>
           <a:p>
@@ -3461,8 +3461,8 @@
         </p:nvSpPr>
         <p:spPr>
           <a:xfrm>
-            <a:off x="148822" y="280988"/>
-            <a:ext cx="696846" cy="520564"/>
+            <a:off x="148822" y="531495"/>
+            <a:ext cx="696846" cy="984660"/>
           </a:xfrm>
         </p:spPr>
         <p:txBody>
@@ -3470,39 +3470,39 @@
           <a:lstStyle>
             <a:lvl1pPr marL="0" indent="0">
               <a:buNone/>
-              <a:defRPr sz="219"/>
+              <a:defRPr sz="378"/>
             </a:lvl1pPr>
-            <a:lvl2pPr marL="62454" indent="0">
-              <a:buNone/>
-              <a:defRPr sz="191"/>
+            <a:lvl2pPr marL="108036" indent="0">
+              <a:buNone/>
+              <a:defRPr sz="331"/>
             </a:lvl2pPr>
-            <a:lvl3pPr marL="124907" indent="0">
-              <a:buNone/>
-              <a:defRPr sz="164"/>
+            <a:lvl3pPr marL="216073" indent="0">
+              <a:buNone/>
+              <a:defRPr sz="284"/>
             </a:lvl3pPr>
-            <a:lvl4pPr marL="187361" indent="0">
-              <a:buNone/>
-              <a:defRPr sz="137"/>
+            <a:lvl4pPr marL="324109" indent="0">
+              <a:buNone/>
+              <a:defRPr sz="236"/>
             </a:lvl4pPr>
-            <a:lvl5pPr marL="249814" indent="0">
-              <a:buNone/>
-              <a:defRPr sz="137"/>
+            <a:lvl5pPr marL="432145" indent="0">
+              <a:buNone/>
+              <a:defRPr sz="236"/>
             </a:lvl5pPr>
-            <a:lvl6pPr marL="312268" indent="0">
-              <a:buNone/>
-              <a:defRPr sz="137"/>
+            <a:lvl6pPr marL="540182" indent="0">
+              <a:buNone/>
+              <a:defRPr sz="236"/>
             </a:lvl6pPr>
-            <a:lvl7pPr marL="374721" indent="0">
-              <a:buNone/>
-              <a:defRPr sz="137"/>
+            <a:lvl7pPr marL="648218" indent="0">
+              <a:buNone/>
+              <a:defRPr sz="236"/>
             </a:lvl7pPr>
-            <a:lvl8pPr marL="437175" indent="0">
-              <a:buNone/>
-              <a:defRPr sz="137"/>
+            <a:lvl8pPr marL="756255" indent="0">
+              <a:buNone/>
+              <a:defRPr sz="236"/>
             </a:lvl8pPr>
-            <a:lvl9pPr marL="499628" indent="0">
-              <a:buNone/>
-              <a:defRPr sz="137"/>
+            <a:lvl9pPr marL="864291" indent="0">
+              <a:buNone/>
+              <a:defRPr sz="236"/>
             </a:lvl9pPr>
           </a:lstStyle>
           <a:p>
@@ -3531,7 +3531,7 @@
           <a:p>
             <a:fld id="{CF9FBDB8-36C6-4744-999D-C99C2C96D370}" type="datetimeFigureOut">
               <a:rPr lang="en-DE" smtClean="0"/>
-              <a:t>11.05.26</a:t>
+              <a:t>21.05.26</a:t>
             </a:fld>
             <a:endParaRPr lang="en-DE"/>
           </a:p>
@@ -3582,7 +3582,7 @@
     </p:spTree>
     <p:extLst>
       <p:ext uri="{BB962C8B-B14F-4D97-AF65-F5344CB8AC3E}">
-        <p14:creationId xmlns:p14="http://schemas.microsoft.com/office/powerpoint/2010/main" val="3374392057"/>
+        <p14:creationId xmlns:p14="http://schemas.microsoft.com/office/powerpoint/2010/main" val="2558736648"/>
       </p:ext>
     </p:extLst>
   </p:cSld>
@@ -3626,8 +3626,8 @@
         </p:nvSpPr>
         <p:spPr>
           <a:xfrm>
-            <a:off x="148541" y="49866"/>
-            <a:ext cx="1863507" cy="181038"/>
+            <a:off x="148541" y="94324"/>
+            <a:ext cx="1863507" cy="342437"/>
           </a:xfrm>
           <a:prstGeom prst="rect">
             <a:avLst/>
@@ -3659,8 +3659,8 @@
         </p:nvSpPr>
         <p:spPr>
           <a:xfrm>
-            <a:off x="148541" y="249333"/>
-            <a:ext cx="1863507" cy="594280"/>
+            <a:off x="148541" y="471620"/>
+            <a:ext cx="1863507" cy="1124096"/>
           </a:xfrm>
           <a:prstGeom prst="rect">
             <a:avLst/>
@@ -3721,8 +3721,8 @@
         </p:nvSpPr>
         <p:spPr>
           <a:xfrm>
-            <a:off x="148541" y="868112"/>
-            <a:ext cx="486132" cy="49867"/>
+            <a:off x="148541" y="1642057"/>
+            <a:ext cx="486132" cy="94324"/>
           </a:xfrm>
           <a:prstGeom prst="rect">
             <a:avLst/>
@@ -3732,7 +3732,7 @@
           <a:bodyPr vert="horz" lIns="91440" tIns="45720" rIns="91440" bIns="45720" rtlCol="0" anchor="ctr"/>
           <a:lstStyle>
             <a:lvl1pPr algn="l">
-              <a:defRPr sz="164">
+              <a:defRPr sz="284">
                 <a:solidFill>
                   <a:schemeClr val="tx1">
                     <a:tint val="82000"/>
@@ -3744,7 +3744,7 @@
           <a:p>
             <a:fld id="{CF9FBDB8-36C6-4744-999D-C99C2C96D370}" type="datetimeFigureOut">
               <a:rPr lang="en-DE" smtClean="0"/>
-              <a:t>11.05.26</a:t>
+              <a:t>21.05.26</a:t>
             </a:fld>
             <a:endParaRPr lang="en-DE"/>
           </a:p>
@@ -3762,8 +3762,8 @@
         </p:nvSpPr>
         <p:spPr>
           <a:xfrm>
-            <a:off x="715695" y="868112"/>
-            <a:ext cx="729198" cy="49867"/>
+            <a:off x="715695" y="1642057"/>
+            <a:ext cx="729198" cy="94324"/>
           </a:xfrm>
           <a:prstGeom prst="rect">
             <a:avLst/>
@@ -3773,7 +3773,7 @@
           <a:bodyPr vert="horz" lIns="91440" tIns="45720" rIns="91440" bIns="45720" rtlCol="0" anchor="ctr"/>
           <a:lstStyle>
             <a:lvl1pPr algn="ctr">
-              <a:defRPr sz="164">
+              <a:defRPr sz="284">
                 <a:solidFill>
                   <a:schemeClr val="tx1">
                     <a:tint val="82000"/>
@@ -3799,8 +3799,8 @@
         </p:nvSpPr>
         <p:spPr>
           <a:xfrm>
-            <a:off x="1525915" y="868112"/>
-            <a:ext cx="486132" cy="49867"/>
+            <a:off x="1525915" y="1642057"/>
+            <a:ext cx="486132" cy="94324"/>
           </a:xfrm>
           <a:prstGeom prst="rect">
             <a:avLst/>
@@ -3810,7 +3810,7 @@
           <a:bodyPr vert="horz" lIns="91440" tIns="45720" rIns="91440" bIns="45720" rtlCol="0" anchor="ctr"/>
           <a:lstStyle>
             <a:lvl1pPr algn="r">
-              <a:defRPr sz="164">
+              <a:defRPr sz="284">
                 <a:solidFill>
                   <a:schemeClr val="tx1">
                     <a:tint val="82000"/>
@@ -3831,27 +3831,27 @@
     </p:spTree>
     <p:extLst>
       <p:ext uri="{BB962C8B-B14F-4D97-AF65-F5344CB8AC3E}">
-        <p14:creationId xmlns:p14="http://schemas.microsoft.com/office/powerpoint/2010/main" val="351579155"/>
+        <p14:creationId xmlns:p14="http://schemas.microsoft.com/office/powerpoint/2010/main" val="1970680426"/>
       </p:ext>
     </p:extLst>
   </p:cSld>
   <p:clrMap bg1="lt1" tx1="dk1" bg2="lt2" tx2="dk2" accent1="accent1" accent2="accent2" accent3="accent3" accent4="accent4" accent5="accent5" accent6="accent6" hlink="hlink" folHlink="folHlink"/>
   <p:sldLayoutIdLst>
-    <p:sldLayoutId id="2147483961" r:id="rId1"/>
-    <p:sldLayoutId id="2147483962" r:id="rId2"/>
-    <p:sldLayoutId id="2147483963" r:id="rId3"/>
-    <p:sldLayoutId id="2147483964" r:id="rId4"/>
-    <p:sldLayoutId id="2147483965" r:id="rId5"/>
-    <p:sldLayoutId id="2147483966" r:id="rId6"/>
-    <p:sldLayoutId id="2147483967" r:id="rId7"/>
-    <p:sldLayoutId id="2147483968" r:id="rId8"/>
-    <p:sldLayoutId id="2147483969" r:id="rId9"/>
-    <p:sldLayoutId id="2147483970" r:id="rId10"/>
-    <p:sldLayoutId id="2147483971" r:id="rId11"/>
+    <p:sldLayoutId id="2147484045" r:id="rId1"/>
+    <p:sldLayoutId id="2147484046" r:id="rId2"/>
+    <p:sldLayoutId id="2147484047" r:id="rId3"/>
+    <p:sldLayoutId id="2147484048" r:id="rId4"/>
+    <p:sldLayoutId id="2147484049" r:id="rId5"/>
+    <p:sldLayoutId id="2147484050" r:id="rId6"/>
+    <p:sldLayoutId id="2147484051" r:id="rId7"/>
+    <p:sldLayoutId id="2147484052" r:id="rId8"/>
+    <p:sldLayoutId id="2147484053" r:id="rId9"/>
+    <p:sldLayoutId id="2147484054" r:id="rId10"/>
+    <p:sldLayoutId id="2147484055" r:id="rId11"/>
   </p:sldLayoutIdLst>
   <p:txStyles>
     <p:titleStyle>
-      <a:lvl1pPr algn="l" defTabSz="124907" rtl="0" eaLnBrk="1" latinLnBrk="0" hangingPunct="1">
+      <a:lvl1pPr algn="l" defTabSz="216073" rtl="0" eaLnBrk="1" latinLnBrk="0" hangingPunct="1">
         <a:lnSpc>
           <a:spcPct val="90000"/>
         </a:lnSpc>
@@ -3859,7 +3859,7 @@
           <a:spcPct val="0"/>
         </a:spcBef>
         <a:buNone/>
-        <a:defRPr sz="601" kern="1200">
+        <a:defRPr sz="1040" kern="1200">
           <a:solidFill>
             <a:schemeClr val="tx1"/>
           </a:solidFill>
@@ -3870,16 +3870,16 @@
       </a:lvl1pPr>
     </p:titleStyle>
     <p:bodyStyle>
-      <a:lvl1pPr marL="31227" indent="-31227" algn="l" defTabSz="124907" rtl="0" eaLnBrk="1" latinLnBrk="0" hangingPunct="1">
+      <a:lvl1pPr marL="54018" indent="-54018" algn="l" defTabSz="216073" rtl="0" eaLnBrk="1" latinLnBrk="0" hangingPunct="1">
         <a:lnSpc>
           <a:spcPct val="90000"/>
         </a:lnSpc>
         <a:spcBef>
-          <a:spcPts val="137"/>
+          <a:spcPts val="236"/>
         </a:spcBef>
         <a:buFont typeface="Arial" panose="020B0604020202020204" pitchFamily="34" charset="0"/>
         <a:buChar char="•"/>
-        <a:defRPr sz="382" kern="1200">
+        <a:defRPr sz="662" kern="1200">
           <a:solidFill>
             <a:schemeClr val="tx1"/>
           </a:solidFill>
@@ -3888,16 +3888,16 @@
           <a:cs typeface="+mn-cs"/>
         </a:defRPr>
       </a:lvl1pPr>
-      <a:lvl2pPr marL="93680" indent="-31227" algn="l" defTabSz="124907" rtl="0" eaLnBrk="1" latinLnBrk="0" hangingPunct="1">
+      <a:lvl2pPr marL="162055" indent="-54018" algn="l" defTabSz="216073" rtl="0" eaLnBrk="1" latinLnBrk="0" hangingPunct="1">
         <a:lnSpc>
           <a:spcPct val="90000"/>
         </a:lnSpc>
         <a:spcBef>
-          <a:spcPts val="68"/>
+          <a:spcPts val="118"/>
         </a:spcBef>
         <a:buFont typeface="Arial" panose="020B0604020202020204" pitchFamily="34" charset="0"/>
         <a:buChar char="•"/>
-        <a:defRPr sz="328" kern="1200">
+        <a:defRPr sz="567" kern="1200">
           <a:solidFill>
             <a:schemeClr val="tx1"/>
           </a:solidFill>
@@ -3906,16 +3906,16 @@
           <a:cs typeface="+mn-cs"/>
         </a:defRPr>
       </a:lvl2pPr>
-      <a:lvl3pPr marL="156134" indent="-31227" algn="l" defTabSz="124907" rtl="0" eaLnBrk="1" latinLnBrk="0" hangingPunct="1">
+      <a:lvl3pPr marL="270091" indent="-54018" algn="l" defTabSz="216073" rtl="0" eaLnBrk="1" latinLnBrk="0" hangingPunct="1">
         <a:lnSpc>
           <a:spcPct val="90000"/>
         </a:lnSpc>
         <a:spcBef>
-          <a:spcPts val="68"/>
+          <a:spcPts val="118"/>
         </a:spcBef>
         <a:buFont typeface="Arial" panose="020B0604020202020204" pitchFamily="34" charset="0"/>
         <a:buChar char="•"/>
-        <a:defRPr sz="273" kern="1200">
+        <a:defRPr sz="473" kern="1200">
           <a:solidFill>
             <a:schemeClr val="tx1"/>
           </a:solidFill>
@@ -3924,16 +3924,16 @@
           <a:cs typeface="+mn-cs"/>
         </a:defRPr>
       </a:lvl3pPr>
-      <a:lvl4pPr marL="218587" indent="-31227" algn="l" defTabSz="124907" rtl="0" eaLnBrk="1" latinLnBrk="0" hangingPunct="1">
+      <a:lvl4pPr marL="378127" indent="-54018" algn="l" defTabSz="216073" rtl="0" eaLnBrk="1" latinLnBrk="0" hangingPunct="1">
         <a:lnSpc>
           <a:spcPct val="90000"/>
         </a:lnSpc>
         <a:spcBef>
-          <a:spcPts val="68"/>
+          <a:spcPts val="118"/>
         </a:spcBef>
         <a:buFont typeface="Arial" panose="020B0604020202020204" pitchFamily="34" charset="0"/>
         <a:buChar char="•"/>
-        <a:defRPr sz="246" kern="1200">
+        <a:defRPr sz="425" kern="1200">
           <a:solidFill>
             <a:schemeClr val="tx1"/>
           </a:solidFill>
@@ -3942,16 +3942,16 @@
           <a:cs typeface="+mn-cs"/>
         </a:defRPr>
       </a:lvl4pPr>
-      <a:lvl5pPr marL="281041" indent="-31227" algn="l" defTabSz="124907" rtl="0" eaLnBrk="1" latinLnBrk="0" hangingPunct="1">
+      <a:lvl5pPr marL="486164" indent="-54018" algn="l" defTabSz="216073" rtl="0" eaLnBrk="1" latinLnBrk="0" hangingPunct="1">
         <a:lnSpc>
           <a:spcPct val="90000"/>
         </a:lnSpc>
         <a:spcBef>
-          <a:spcPts val="68"/>
+          <a:spcPts val="118"/>
         </a:spcBef>
         <a:buFont typeface="Arial" panose="020B0604020202020204" pitchFamily="34" charset="0"/>
         <a:buChar char="•"/>
-        <a:defRPr sz="246" kern="1200">
+        <a:defRPr sz="425" kern="1200">
           <a:solidFill>
             <a:schemeClr val="tx1"/>
           </a:solidFill>
@@ -3960,16 +3960,16 @@
           <a:cs typeface="+mn-cs"/>
         </a:defRPr>
       </a:lvl5pPr>
-      <a:lvl6pPr marL="343494" indent="-31227" algn="l" defTabSz="124907" rtl="0" eaLnBrk="1" latinLnBrk="0" hangingPunct="1">
+      <a:lvl6pPr marL="594200" indent="-54018" algn="l" defTabSz="216073" rtl="0" eaLnBrk="1" latinLnBrk="0" hangingPunct="1">
         <a:lnSpc>
           <a:spcPct val="90000"/>
         </a:lnSpc>
         <a:spcBef>
-          <a:spcPts val="68"/>
+          <a:spcPts val="118"/>
         </a:spcBef>
         <a:buFont typeface="Arial" panose="020B0604020202020204" pitchFamily="34" charset="0"/>
         <a:buChar char="•"/>
-        <a:defRPr sz="246" kern="1200">
+        <a:defRPr sz="425" kern="1200">
           <a:solidFill>
             <a:schemeClr val="tx1"/>
           </a:solidFill>
@@ -3978,16 +3978,16 @@
           <a:cs typeface="+mn-cs"/>
         </a:defRPr>
       </a:lvl6pPr>
-      <a:lvl7pPr marL="405948" indent="-31227" algn="l" defTabSz="124907" rtl="0" eaLnBrk="1" latinLnBrk="0" hangingPunct="1">
+      <a:lvl7pPr marL="702236" indent="-54018" algn="l" defTabSz="216073" rtl="0" eaLnBrk="1" latinLnBrk="0" hangingPunct="1">
         <a:lnSpc>
           <a:spcPct val="90000"/>
         </a:lnSpc>
         <a:spcBef>
-          <a:spcPts val="68"/>
+          <a:spcPts val="118"/>
         </a:spcBef>
         <a:buFont typeface="Arial" panose="020B0604020202020204" pitchFamily="34" charset="0"/>
         <a:buChar char="•"/>
-        <a:defRPr sz="246" kern="1200">
+        <a:defRPr sz="425" kern="1200">
           <a:solidFill>
             <a:schemeClr val="tx1"/>
           </a:solidFill>
@@ -3996,16 +3996,16 @@
           <a:cs typeface="+mn-cs"/>
         </a:defRPr>
       </a:lvl7pPr>
-      <a:lvl8pPr marL="468401" indent="-31227" algn="l" defTabSz="124907" rtl="0" eaLnBrk="1" latinLnBrk="0" hangingPunct="1">
+      <a:lvl8pPr marL="810273" indent="-54018" algn="l" defTabSz="216073" rtl="0" eaLnBrk="1" latinLnBrk="0" hangingPunct="1">
         <a:lnSpc>
           <a:spcPct val="90000"/>
         </a:lnSpc>
         <a:spcBef>
-          <a:spcPts val="68"/>
+          <a:spcPts val="118"/>
         </a:spcBef>
         <a:buFont typeface="Arial" panose="020B0604020202020204" pitchFamily="34" charset="0"/>
         <a:buChar char="•"/>
-        <a:defRPr sz="246" kern="1200">
+        <a:defRPr sz="425" kern="1200">
           <a:solidFill>
             <a:schemeClr val="tx1"/>
           </a:solidFill>
@@ -4014,16 +4014,16 @@
           <a:cs typeface="+mn-cs"/>
         </a:defRPr>
       </a:lvl8pPr>
-      <a:lvl9pPr marL="530855" indent="-31227" algn="l" defTabSz="124907" rtl="0" eaLnBrk="1" latinLnBrk="0" hangingPunct="1">
+      <a:lvl9pPr marL="918309" indent="-54018" algn="l" defTabSz="216073" rtl="0" eaLnBrk="1" latinLnBrk="0" hangingPunct="1">
         <a:lnSpc>
           <a:spcPct val="90000"/>
         </a:lnSpc>
         <a:spcBef>
-          <a:spcPts val="68"/>
+          <a:spcPts val="118"/>
         </a:spcBef>
         <a:buFont typeface="Arial" panose="020B0604020202020204" pitchFamily="34" charset="0"/>
         <a:buChar char="•"/>
-        <a:defRPr sz="246" kern="1200">
+        <a:defRPr sz="425" kern="1200">
           <a:solidFill>
             <a:schemeClr val="tx1"/>
           </a:solidFill>
@@ -4037,8 +4037,8 @@
       <a:defPPr>
         <a:defRPr lang="en-US"/>
       </a:defPPr>
-      <a:lvl1pPr marL="0" algn="l" defTabSz="124907" rtl="0" eaLnBrk="1" latinLnBrk="0" hangingPunct="1">
-        <a:defRPr sz="246" kern="1200">
+      <a:lvl1pPr marL="0" algn="l" defTabSz="216073" rtl="0" eaLnBrk="1" latinLnBrk="0" hangingPunct="1">
+        <a:defRPr sz="425" kern="1200">
           <a:solidFill>
             <a:schemeClr val="tx1"/>
           </a:solidFill>
@@ -4047,8 +4047,8 @@
           <a:cs typeface="+mn-cs"/>
         </a:defRPr>
       </a:lvl1pPr>
-      <a:lvl2pPr marL="62454" algn="l" defTabSz="124907" rtl="0" eaLnBrk="1" latinLnBrk="0" hangingPunct="1">
-        <a:defRPr sz="246" kern="1200">
+      <a:lvl2pPr marL="108036" algn="l" defTabSz="216073" rtl="0" eaLnBrk="1" latinLnBrk="0" hangingPunct="1">
+        <a:defRPr sz="425" kern="1200">
           <a:solidFill>
             <a:schemeClr val="tx1"/>
           </a:solidFill>
@@ -4057,8 +4057,8 @@
           <a:cs typeface="+mn-cs"/>
         </a:defRPr>
       </a:lvl2pPr>
-      <a:lvl3pPr marL="124907" algn="l" defTabSz="124907" rtl="0" eaLnBrk="1" latinLnBrk="0" hangingPunct="1">
-        <a:defRPr sz="246" kern="1200">
+      <a:lvl3pPr marL="216073" algn="l" defTabSz="216073" rtl="0" eaLnBrk="1" latinLnBrk="0" hangingPunct="1">
+        <a:defRPr sz="425" kern="1200">
           <a:solidFill>
             <a:schemeClr val="tx1"/>
           </a:solidFill>
@@ -4067,8 +4067,8 @@
           <a:cs typeface="+mn-cs"/>
         </a:defRPr>
       </a:lvl3pPr>
-      <a:lvl4pPr marL="187361" algn="l" defTabSz="124907" rtl="0" eaLnBrk="1" latinLnBrk="0" hangingPunct="1">
-        <a:defRPr sz="246" kern="1200">
+      <a:lvl4pPr marL="324109" algn="l" defTabSz="216073" rtl="0" eaLnBrk="1" latinLnBrk="0" hangingPunct="1">
+        <a:defRPr sz="425" kern="1200">
           <a:solidFill>
             <a:schemeClr val="tx1"/>
           </a:solidFill>
@@ -4077,8 +4077,8 @@
           <a:cs typeface="+mn-cs"/>
         </a:defRPr>
       </a:lvl4pPr>
-      <a:lvl5pPr marL="249814" algn="l" defTabSz="124907" rtl="0" eaLnBrk="1" latinLnBrk="0" hangingPunct="1">
-        <a:defRPr sz="246" kern="1200">
+      <a:lvl5pPr marL="432145" algn="l" defTabSz="216073" rtl="0" eaLnBrk="1" latinLnBrk="0" hangingPunct="1">
+        <a:defRPr sz="425" kern="1200">
           <a:solidFill>
             <a:schemeClr val="tx1"/>
           </a:solidFill>
@@ -4087,8 +4087,8 @@
           <a:cs typeface="+mn-cs"/>
         </a:defRPr>
       </a:lvl5pPr>
-      <a:lvl6pPr marL="312268" algn="l" defTabSz="124907" rtl="0" eaLnBrk="1" latinLnBrk="0" hangingPunct="1">
-        <a:defRPr sz="246" kern="1200">
+      <a:lvl6pPr marL="540182" algn="l" defTabSz="216073" rtl="0" eaLnBrk="1" latinLnBrk="0" hangingPunct="1">
+        <a:defRPr sz="425" kern="1200">
           <a:solidFill>
             <a:schemeClr val="tx1"/>
           </a:solidFill>
@@ -4097,8 +4097,8 @@
           <a:cs typeface="+mn-cs"/>
         </a:defRPr>
       </a:lvl6pPr>
-      <a:lvl7pPr marL="374721" algn="l" defTabSz="124907" rtl="0" eaLnBrk="1" latinLnBrk="0" hangingPunct="1">
-        <a:defRPr sz="246" kern="1200">
+      <a:lvl7pPr marL="648218" algn="l" defTabSz="216073" rtl="0" eaLnBrk="1" latinLnBrk="0" hangingPunct="1">
+        <a:defRPr sz="425" kern="1200">
           <a:solidFill>
             <a:schemeClr val="tx1"/>
           </a:solidFill>
@@ -4107,8 +4107,8 @@
           <a:cs typeface="+mn-cs"/>
         </a:defRPr>
       </a:lvl7pPr>
-      <a:lvl8pPr marL="437175" algn="l" defTabSz="124907" rtl="0" eaLnBrk="1" latinLnBrk="0" hangingPunct="1">
-        <a:defRPr sz="246" kern="1200">
+      <a:lvl8pPr marL="756255" algn="l" defTabSz="216073" rtl="0" eaLnBrk="1" latinLnBrk="0" hangingPunct="1">
+        <a:defRPr sz="425" kern="1200">
           <a:solidFill>
             <a:schemeClr val="tx1"/>
           </a:solidFill>
@@ -4117,8 +4117,8 @@
           <a:cs typeface="+mn-cs"/>
         </a:defRPr>
       </a:lvl8pPr>
-      <a:lvl9pPr marL="499628" algn="l" defTabSz="124907" rtl="0" eaLnBrk="1" latinLnBrk="0" hangingPunct="1">
-        <a:defRPr sz="246" kern="1200">
+      <a:lvl9pPr marL="864291" algn="l" defTabSz="216073" rtl="0" eaLnBrk="1" latinLnBrk="0" hangingPunct="1">
+        <a:defRPr sz="425" kern="1200">
           <a:solidFill>
             <a:schemeClr val="tx1"/>
           </a:solidFill>
@@ -4151,10 +4151,10 @@
       </p:grpSpPr>
       <p:pic>
         <p:nvPicPr>
-          <p:cNvPr id="50" name="Picture 49">
+          <p:cNvPr id="131" name="Picture 130">
             <a:extLst>
               <a:ext uri="{FF2B5EF4-FFF2-40B4-BE49-F238E27FC236}">
-                <a16:creationId xmlns:a16="http://schemas.microsoft.com/office/drawing/2014/main" id="{8FEAF6EB-CE03-1EE7-61D7-8B9DB2843039}"/>
+                <a16:creationId xmlns:a16="http://schemas.microsoft.com/office/drawing/2014/main" id="{1B14CBD4-9A1C-98E4-5022-B72CDC6921C2}"/>
               </a:ext>
             </a:extLst>
           </p:cNvPr>
@@ -4171,8 +4171,8 @@
         </p:blipFill>
         <p:spPr>
           <a:xfrm>
-            <a:off x="57394" y="11884"/>
-            <a:ext cx="956036" cy="478018"/>
+            <a:off x="1450754" y="930528"/>
+            <a:ext cx="705635" cy="423381"/>
           </a:xfrm>
           <a:prstGeom prst="rect">
             <a:avLst/>
@@ -4181,10 +4181,10 @@
       </p:pic>
       <p:pic>
         <p:nvPicPr>
-          <p:cNvPr id="51" name="Picture 50">
+          <p:cNvPr id="132" name="Picture 131">
             <a:extLst>
               <a:ext uri="{FF2B5EF4-FFF2-40B4-BE49-F238E27FC236}">
-                <a16:creationId xmlns:a16="http://schemas.microsoft.com/office/drawing/2014/main" id="{AA8863A3-B58A-72A4-EE45-14D699119020}"/>
+                <a16:creationId xmlns:a16="http://schemas.microsoft.com/office/drawing/2014/main" id="{8F97C151-EDB4-EC0C-F5DF-F478B5936888}"/>
               </a:ext>
             </a:extLst>
           </p:cNvPr>
@@ -4201,8 +4201,8 @@
         </p:blipFill>
         <p:spPr>
           <a:xfrm>
-            <a:off x="1085637" y="10382"/>
-            <a:ext cx="1064500" cy="456214"/>
+            <a:off x="719093" y="922651"/>
+            <a:ext cx="705635" cy="423381"/>
           </a:xfrm>
           <a:prstGeom prst="rect">
             <a:avLst/>
@@ -4211,10 +4211,10 @@
       </p:pic>
       <p:pic>
         <p:nvPicPr>
-          <p:cNvPr id="52" name="Picture 51">
+          <p:cNvPr id="133" name="Picture 132">
             <a:extLst>
               <a:ext uri="{FF2B5EF4-FFF2-40B4-BE49-F238E27FC236}">
-                <a16:creationId xmlns:a16="http://schemas.microsoft.com/office/drawing/2014/main" id="{DA1238EF-7D3D-1AC6-7269-AF5BA504FC29}"/>
+                <a16:creationId xmlns:a16="http://schemas.microsoft.com/office/drawing/2014/main" id="{94895A27-3CB6-99B9-C57B-33EDFD7D27E9}"/>
               </a:ext>
             </a:extLst>
           </p:cNvPr>
@@ -4231,8 +4231,8 @@
         </p:blipFill>
         <p:spPr>
           <a:xfrm>
-            <a:off x="1613" y="481385"/>
-            <a:ext cx="1064499" cy="456214"/>
+            <a:off x="3629" y="930528"/>
+            <a:ext cx="705635" cy="423381"/>
           </a:xfrm>
           <a:prstGeom prst="rect">
             <a:avLst/>
@@ -4241,10 +4241,10 @@
       </p:pic>
       <p:pic>
         <p:nvPicPr>
-          <p:cNvPr id="53" name="Picture 52">
+          <p:cNvPr id="134" name="Picture 133">
             <a:extLst>
               <a:ext uri="{FF2B5EF4-FFF2-40B4-BE49-F238E27FC236}">
-                <a16:creationId xmlns:a16="http://schemas.microsoft.com/office/drawing/2014/main" id="{B75CD0C0-D61D-BCCE-039A-EAE404967587}"/>
+                <a16:creationId xmlns:a16="http://schemas.microsoft.com/office/drawing/2014/main" id="{5AD0F989-DF16-0A64-F7DD-2BD5D3AACC4E}"/>
               </a:ext>
             </a:extLst>
           </p:cNvPr>
@@ -4261,20 +4261,110 @@
         </p:blipFill>
         <p:spPr>
           <a:xfrm>
-            <a:off x="1084303" y="480083"/>
-            <a:ext cx="1064499" cy="456214"/>
+            <a:off x="1079689" y="5316"/>
+            <a:ext cx="1061074" cy="454746"/>
           </a:xfrm>
           <a:prstGeom prst="rect">
             <a:avLst/>
           </a:prstGeom>
         </p:spPr>
       </p:pic>
-      <p:sp>
-        <p:nvSpPr>
-          <p:cNvPr id="54" name="TextBox 53">
+      <p:pic>
+        <p:nvPicPr>
+          <p:cNvPr id="135" name="Picture 134">
             <a:extLst>
               <a:ext uri="{FF2B5EF4-FFF2-40B4-BE49-F238E27FC236}">
-                <a16:creationId xmlns:a16="http://schemas.microsoft.com/office/drawing/2014/main" id="{077DC661-CF55-F207-48A8-B051E7F4BD71}"/>
+                <a16:creationId xmlns:a16="http://schemas.microsoft.com/office/drawing/2014/main" id="{36228C4C-24C4-6745-5FD7-D6AF0885F6EE}"/>
+              </a:ext>
+            </a:extLst>
+          </p:cNvPr>
+          <p:cNvPicPr>
+            <a:picLocks noChangeAspect="1"/>
+          </p:cNvPicPr>
+          <p:nvPr/>
+        </p:nvPicPr>
+        <p:blipFill>
+          <a:blip r:embed="rId7"/>
+          <a:stretch>
+            <a:fillRect/>
+          </a:stretch>
+        </p:blipFill>
+        <p:spPr>
+          <a:xfrm>
+            <a:off x="3175" y="475545"/>
+            <a:ext cx="1064502" cy="456215"/>
+          </a:xfrm>
+          <a:prstGeom prst="rect">
+            <a:avLst/>
+          </a:prstGeom>
+        </p:spPr>
+      </p:pic>
+      <p:pic>
+        <p:nvPicPr>
+          <p:cNvPr id="136" name="Picture 135">
+            <a:extLst>
+              <a:ext uri="{FF2B5EF4-FFF2-40B4-BE49-F238E27FC236}">
+                <a16:creationId xmlns:a16="http://schemas.microsoft.com/office/drawing/2014/main" id="{D8849609-461A-0EFB-A66A-0594CD780672}"/>
+              </a:ext>
+            </a:extLst>
+          </p:cNvPr>
+          <p:cNvPicPr>
+            <a:picLocks noChangeAspect="1"/>
+          </p:cNvPicPr>
+          <p:nvPr/>
+        </p:nvPicPr>
+        <p:blipFill>
+          <a:blip r:embed="rId8"/>
+          <a:stretch>
+            <a:fillRect/>
+          </a:stretch>
+        </p:blipFill>
+        <p:spPr>
+          <a:xfrm>
+            <a:off x="1079689" y="470498"/>
+            <a:ext cx="1064500" cy="456214"/>
+          </a:xfrm>
+          <a:prstGeom prst="rect">
+            <a:avLst/>
+          </a:prstGeom>
+        </p:spPr>
+      </p:pic>
+      <p:pic>
+        <p:nvPicPr>
+          <p:cNvPr id="137" name="Picture 136">
+            <a:extLst>
+              <a:ext uri="{FF2B5EF4-FFF2-40B4-BE49-F238E27FC236}">
+                <a16:creationId xmlns:a16="http://schemas.microsoft.com/office/drawing/2014/main" id="{43E50B3B-CB3E-B0EC-AEB5-935EEC20741C}"/>
+              </a:ext>
+            </a:extLst>
+          </p:cNvPr>
+          <p:cNvPicPr>
+            <a:picLocks noChangeAspect="1"/>
+          </p:cNvPicPr>
+          <p:nvPr/>
+        </p:nvPicPr>
+        <p:blipFill>
+          <a:blip r:embed="rId9"/>
+          <a:stretch>
+            <a:fillRect/>
+          </a:stretch>
+        </p:blipFill>
+        <p:spPr>
+          <a:xfrm>
+            <a:off x="57394" y="997"/>
+            <a:ext cx="956036" cy="478018"/>
+          </a:xfrm>
+          <a:prstGeom prst="rect">
+            <a:avLst/>
+          </a:prstGeom>
+        </p:spPr>
+      </p:pic>
+      <p:sp>
+        <p:nvSpPr>
+          <p:cNvPr id="138" name="TextBox 137">
+            <a:extLst>
+              <a:ext uri="{FF2B5EF4-FFF2-40B4-BE49-F238E27FC236}">
+                <a16:creationId xmlns:a16="http://schemas.microsoft.com/office/drawing/2014/main" id="{AE4152EB-FA1D-F25D-F654-871F96B70F5A}"/>
               </a:ext>
             </a:extLst>
           </p:cNvPr>
@@ -4283,7 +4373,7 @@
         </p:nvSpPr>
         <p:spPr>
           <a:xfrm>
-            <a:off x="-20362" y="-44759"/>
+            <a:off x="-20362" y="-55646"/>
             <a:ext cx="80896" cy="169277"/>
           </a:xfrm>
           <a:prstGeom prst="rect">
@@ -4306,10 +4396,10 @@
       </p:sp>
       <p:sp>
         <p:nvSpPr>
-          <p:cNvPr id="55" name="TextBox 54">
+          <p:cNvPr id="139" name="TextBox 138">
             <a:extLst>
               <a:ext uri="{FF2B5EF4-FFF2-40B4-BE49-F238E27FC236}">
-                <a16:creationId xmlns:a16="http://schemas.microsoft.com/office/drawing/2014/main" id="{5E619D14-8345-7120-A41A-F132173B5471}"/>
+                <a16:creationId xmlns:a16="http://schemas.microsoft.com/office/drawing/2014/main" id="{B57202F0-A3E6-4B64-4B83-B89F96F6FB17}"/>
               </a:ext>
             </a:extLst>
           </p:cNvPr>
@@ -4318,7 +4408,7 @@
         </p:nvSpPr>
         <p:spPr>
           <a:xfrm>
-            <a:off x="1039241" y="-44759"/>
+            <a:off x="1039241" y="-55646"/>
             <a:ext cx="80896" cy="169277"/>
           </a:xfrm>
           <a:prstGeom prst="rect">
@@ -4341,10 +4431,10 @@
       </p:sp>
       <p:sp>
         <p:nvSpPr>
-          <p:cNvPr id="56" name="TextBox 55">
+          <p:cNvPr id="140" name="TextBox 139">
             <a:extLst>
               <a:ext uri="{FF2B5EF4-FFF2-40B4-BE49-F238E27FC236}">
-                <a16:creationId xmlns:a16="http://schemas.microsoft.com/office/drawing/2014/main" id="{47DBFB5F-7159-A7D4-183C-CD911141E28B}"/>
+                <a16:creationId xmlns:a16="http://schemas.microsoft.com/office/drawing/2014/main" id="{3B153E27-2419-437B-9F33-66F5E2A49356}"/>
               </a:ext>
             </a:extLst>
           </p:cNvPr>
@@ -4353,7 +4443,7 @@
         </p:nvSpPr>
         <p:spPr>
           <a:xfrm>
-            <a:off x="-24044" y="413647"/>
+            <a:off x="-24044" y="402760"/>
             <a:ext cx="80896" cy="169277"/>
           </a:xfrm>
           <a:prstGeom prst="rect">
@@ -4376,10 +4466,10 @@
       </p:sp>
       <p:sp>
         <p:nvSpPr>
-          <p:cNvPr id="57" name="TextBox 56">
+          <p:cNvPr id="141" name="TextBox 140">
             <a:extLst>
               <a:ext uri="{FF2B5EF4-FFF2-40B4-BE49-F238E27FC236}">
-                <a16:creationId xmlns:a16="http://schemas.microsoft.com/office/drawing/2014/main" id="{8521F034-6C35-DEB9-2CD7-959F509BDBC3}"/>
+                <a16:creationId xmlns:a16="http://schemas.microsoft.com/office/drawing/2014/main" id="{425B8B04-0420-87E7-5AF7-CDCD4B2879AB}"/>
               </a:ext>
             </a:extLst>
           </p:cNvPr>
@@ -4388,7 +4478,7 @@
         </p:nvSpPr>
         <p:spPr>
           <a:xfrm>
-            <a:off x="1039954" y="414867"/>
+            <a:off x="1039954" y="403980"/>
             <a:ext cx="80896" cy="169277"/>
           </a:xfrm>
           <a:prstGeom prst="rect">
@@ -4405,6 +4495,306 @@
             <a:r>
               <a:rPr lang="en-DE" sz="500" b="1" dirty="0"/>
               <a:t>D</a:t>
+            </a:r>
+          </a:p>
+        </p:txBody>
+      </p:sp>
+      <p:sp>
+        <p:nvSpPr>
+          <p:cNvPr id="142" name="TextBox 141">
+            <a:extLst>
+              <a:ext uri="{FF2B5EF4-FFF2-40B4-BE49-F238E27FC236}">
+                <a16:creationId xmlns:a16="http://schemas.microsoft.com/office/drawing/2014/main" id="{35E2CFD2-56BB-548B-FBF9-C59B73B0F7C3}"/>
+              </a:ext>
+            </a:extLst>
+          </p:cNvPr>
+          <p:cNvSpPr txBox="1"/>
+          <p:nvPr/>
+        </p:nvSpPr>
+        <p:spPr>
+          <a:xfrm>
+            <a:off x="-28662" y="868632"/>
+            <a:ext cx="80896" cy="169277"/>
+          </a:xfrm>
+          <a:prstGeom prst="rect">
+            <a:avLst/>
+          </a:prstGeom>
+          <a:noFill/>
+        </p:spPr>
+        <p:txBody>
+          <a:bodyPr wrap="square" rtlCol="0">
+            <a:spAutoFit/>
+          </a:bodyPr>
+          <a:lstStyle/>
+          <a:p>
+            <a:r>
+              <a:rPr lang="en-DE" sz="500" b="1" dirty="0"/>
+              <a:t>E</a:t>
+            </a:r>
+          </a:p>
+        </p:txBody>
+      </p:sp>
+      <p:sp>
+        <p:nvSpPr>
+          <p:cNvPr id="143" name="TextBox 142">
+            <a:extLst>
+              <a:ext uri="{FF2B5EF4-FFF2-40B4-BE49-F238E27FC236}">
+                <a16:creationId xmlns:a16="http://schemas.microsoft.com/office/drawing/2014/main" id="{F9AD3D01-FF27-3E7C-B1E8-4475141396CD}"/>
+              </a:ext>
+            </a:extLst>
+          </p:cNvPr>
+          <p:cNvSpPr txBox="1"/>
+          <p:nvPr/>
+        </p:nvSpPr>
+        <p:spPr>
+          <a:xfrm>
+            <a:off x="683372" y="868631"/>
+            <a:ext cx="80896" cy="169277"/>
+          </a:xfrm>
+          <a:prstGeom prst="rect">
+            <a:avLst/>
+          </a:prstGeom>
+          <a:noFill/>
+        </p:spPr>
+        <p:txBody>
+          <a:bodyPr wrap="square" rtlCol="0">
+            <a:spAutoFit/>
+          </a:bodyPr>
+          <a:lstStyle/>
+          <a:p>
+            <a:r>
+              <a:rPr lang="en-DE" sz="500" b="1" dirty="0"/>
+              <a:t>F</a:t>
+            </a:r>
+          </a:p>
+        </p:txBody>
+      </p:sp>
+      <p:sp>
+        <p:nvSpPr>
+          <p:cNvPr id="144" name="TextBox 143">
+            <a:extLst>
+              <a:ext uri="{FF2B5EF4-FFF2-40B4-BE49-F238E27FC236}">
+                <a16:creationId xmlns:a16="http://schemas.microsoft.com/office/drawing/2014/main" id="{EC464E5C-799A-B657-D535-28E4AA8E4B9A}"/>
+              </a:ext>
+            </a:extLst>
+          </p:cNvPr>
+          <p:cNvSpPr txBox="1"/>
+          <p:nvPr/>
+        </p:nvSpPr>
+        <p:spPr>
+          <a:xfrm>
+            <a:off x="1405579" y="865820"/>
+            <a:ext cx="80896" cy="169277"/>
+          </a:xfrm>
+          <a:prstGeom prst="rect">
+            <a:avLst/>
+          </a:prstGeom>
+          <a:noFill/>
+        </p:spPr>
+        <p:txBody>
+          <a:bodyPr wrap="square" rtlCol="0">
+            <a:spAutoFit/>
+          </a:bodyPr>
+          <a:lstStyle/>
+          <a:p>
+            <a:r>
+              <a:rPr lang="en-DE" sz="500" b="1" dirty="0"/>
+              <a:t>G</a:t>
+            </a:r>
+          </a:p>
+        </p:txBody>
+      </p:sp>
+      <p:pic>
+        <p:nvPicPr>
+          <p:cNvPr id="145" name="Picture 144">
+            <a:extLst>
+              <a:ext uri="{FF2B5EF4-FFF2-40B4-BE49-F238E27FC236}">
+                <a16:creationId xmlns:a16="http://schemas.microsoft.com/office/drawing/2014/main" id="{1F0EF41A-18C4-C9C2-99DD-FCA33F565330}"/>
+              </a:ext>
+            </a:extLst>
+          </p:cNvPr>
+          <p:cNvPicPr>
+            <a:picLocks noChangeAspect="1"/>
+          </p:cNvPicPr>
+          <p:nvPr/>
+        </p:nvPicPr>
+        <p:blipFill>
+          <a:blip r:embed="rId10"/>
+          <a:stretch>
+            <a:fillRect/>
+          </a:stretch>
+        </p:blipFill>
+        <p:spPr>
+          <a:xfrm>
+            <a:off x="0" y="1351245"/>
+            <a:ext cx="709630" cy="425778"/>
+          </a:xfrm>
+          <a:prstGeom prst="rect">
+            <a:avLst/>
+          </a:prstGeom>
+        </p:spPr>
+      </p:pic>
+      <p:pic>
+        <p:nvPicPr>
+          <p:cNvPr id="146" name="Picture 145">
+            <a:extLst>
+              <a:ext uri="{FF2B5EF4-FFF2-40B4-BE49-F238E27FC236}">
+                <a16:creationId xmlns:a16="http://schemas.microsoft.com/office/drawing/2014/main" id="{785F3A7D-87E0-2425-6ADF-16D3080B952D}"/>
+              </a:ext>
+            </a:extLst>
+          </p:cNvPr>
+          <p:cNvPicPr>
+            <a:picLocks noChangeAspect="1"/>
+          </p:cNvPicPr>
+          <p:nvPr/>
+        </p:nvPicPr>
+        <p:blipFill>
+          <a:blip r:embed="rId11"/>
+          <a:stretch>
+            <a:fillRect/>
+          </a:stretch>
+        </p:blipFill>
+        <p:spPr>
+          <a:xfrm>
+            <a:off x="717647" y="1352356"/>
+            <a:ext cx="709630" cy="425778"/>
+          </a:xfrm>
+          <a:prstGeom prst="rect">
+            <a:avLst/>
+          </a:prstGeom>
+        </p:spPr>
+      </p:pic>
+      <p:pic>
+        <p:nvPicPr>
+          <p:cNvPr id="147" name="Picture 146">
+            <a:extLst>
+              <a:ext uri="{FF2B5EF4-FFF2-40B4-BE49-F238E27FC236}">
+                <a16:creationId xmlns:a16="http://schemas.microsoft.com/office/drawing/2014/main" id="{6DF0DF33-5A12-EF20-6EBC-FB7C316B7CA9}"/>
+              </a:ext>
+            </a:extLst>
+          </p:cNvPr>
+          <p:cNvPicPr>
+            <a:picLocks noChangeAspect="1"/>
+          </p:cNvPicPr>
+          <p:nvPr/>
+        </p:nvPicPr>
+        <p:blipFill>
+          <a:blip r:embed="rId12"/>
+          <a:stretch>
+            <a:fillRect/>
+          </a:stretch>
+        </p:blipFill>
+        <p:spPr>
+          <a:xfrm>
+            <a:off x="1446027" y="1345678"/>
+            <a:ext cx="709631" cy="425778"/>
+          </a:xfrm>
+          <a:prstGeom prst="rect">
+            <a:avLst/>
+          </a:prstGeom>
+        </p:spPr>
+      </p:pic>
+      <p:sp>
+        <p:nvSpPr>
+          <p:cNvPr id="148" name="TextBox 147">
+            <a:extLst>
+              <a:ext uri="{FF2B5EF4-FFF2-40B4-BE49-F238E27FC236}">
+                <a16:creationId xmlns:a16="http://schemas.microsoft.com/office/drawing/2014/main" id="{16F16E52-8A7E-5A1A-5B2C-43507BF6F361}"/>
+              </a:ext>
+            </a:extLst>
+          </p:cNvPr>
+          <p:cNvSpPr txBox="1"/>
+          <p:nvPr/>
+        </p:nvSpPr>
+        <p:spPr>
+          <a:xfrm>
+            <a:off x="-28662" y="1292857"/>
+            <a:ext cx="80896" cy="169277"/>
+          </a:xfrm>
+          <a:prstGeom prst="rect">
+            <a:avLst/>
+          </a:prstGeom>
+          <a:noFill/>
+        </p:spPr>
+        <p:txBody>
+          <a:bodyPr wrap="square" rtlCol="0">
+            <a:spAutoFit/>
+          </a:bodyPr>
+          <a:lstStyle/>
+          <a:p>
+            <a:r>
+              <a:rPr lang="en-DE" sz="500" b="1" dirty="0"/>
+              <a:t>H</a:t>
+            </a:r>
+          </a:p>
+        </p:txBody>
+      </p:sp>
+      <p:sp>
+        <p:nvSpPr>
+          <p:cNvPr id="149" name="TextBox 148">
+            <a:extLst>
+              <a:ext uri="{FF2B5EF4-FFF2-40B4-BE49-F238E27FC236}">
+                <a16:creationId xmlns:a16="http://schemas.microsoft.com/office/drawing/2014/main" id="{F2D5AE14-D4E4-0B9D-7F36-ECD8B32611FA}"/>
+              </a:ext>
+            </a:extLst>
+          </p:cNvPr>
+          <p:cNvSpPr txBox="1"/>
+          <p:nvPr/>
+        </p:nvSpPr>
+        <p:spPr>
+          <a:xfrm>
+            <a:off x="683372" y="1292856"/>
+            <a:ext cx="80896" cy="169277"/>
+          </a:xfrm>
+          <a:prstGeom prst="rect">
+            <a:avLst/>
+          </a:prstGeom>
+          <a:noFill/>
+        </p:spPr>
+        <p:txBody>
+          <a:bodyPr wrap="square" rtlCol="0">
+            <a:spAutoFit/>
+          </a:bodyPr>
+          <a:lstStyle/>
+          <a:p>
+            <a:r>
+              <a:rPr lang="en-DE" sz="500" b="1" dirty="0"/>
+              <a:t>I</a:t>
+            </a:r>
+          </a:p>
+        </p:txBody>
+      </p:sp>
+      <p:sp>
+        <p:nvSpPr>
+          <p:cNvPr id="150" name="TextBox 149">
+            <a:extLst>
+              <a:ext uri="{FF2B5EF4-FFF2-40B4-BE49-F238E27FC236}">
+                <a16:creationId xmlns:a16="http://schemas.microsoft.com/office/drawing/2014/main" id="{E4A64FAD-1AA3-173D-D47C-6BBDF158575A}"/>
+              </a:ext>
+            </a:extLst>
+          </p:cNvPr>
+          <p:cNvSpPr txBox="1"/>
+          <p:nvPr/>
+        </p:nvSpPr>
+        <p:spPr>
+          <a:xfrm>
+            <a:off x="1405579" y="1290045"/>
+            <a:ext cx="80896" cy="169277"/>
+          </a:xfrm>
+          <a:prstGeom prst="rect">
+            <a:avLst/>
+          </a:prstGeom>
+          <a:noFill/>
+        </p:spPr>
+        <p:txBody>
+          <a:bodyPr wrap="square" rtlCol="0">
+            <a:spAutoFit/>
+          </a:bodyPr>
+          <a:lstStyle/>
+          <a:p>
+            <a:r>
+              <a:rPr lang="en-DE" sz="500" b="1" dirty="0"/>
+              <a:t>J</a:t>
             </a:r>
           </a:p>
         </p:txBody>
